--- a/setup installer.pptx
+++ b/setup installer.pptx
@@ -13,6 +13,8 @@
     <p:sldId id="262" r:id="rId7"/>
     <p:sldId id="263" r:id="rId8"/>
     <p:sldId id="261" r:id="rId9"/>
+    <p:sldId id="264" r:id="rId10"/>
+    <p:sldId id="265" r:id="rId11"/>
   </p:sldIdLst>
   <p:sldSz cx="12192000" cy="6858000"/>
   <p:notesSz cx="6858000" cy="9144000"/>
@@ -3401,6 +3403,369 @@
 </p:sld>
 </file>
 
+<file path=ppt/slides/slide10.xml><?xml version="1.0" encoding="utf-8"?>
+<p:sld xmlns:a="http://schemas.openxmlformats.org/drawingml/2006/main" xmlns:r="http://schemas.openxmlformats.org/officeDocument/2006/relationships" xmlns:p="http://schemas.openxmlformats.org/presentationml/2006/main">
+  <p:cSld>
+    <p:spTree>
+      <p:nvGrpSpPr>
+        <p:cNvPr id="1" name=""/>
+        <p:cNvGrpSpPr/>
+        <p:nvPr/>
+      </p:nvGrpSpPr>
+      <p:grpSpPr>
+        <a:xfrm>
+          <a:off x="0" y="0"/>
+          <a:ext cx="0" cy="0"/>
+          <a:chOff x="0" y="0"/>
+          <a:chExt cx="0" cy="0"/>
+        </a:xfrm>
+      </p:grpSpPr>
+      <p:sp>
+        <p:nvSpPr>
+          <p:cNvPr id="6" name="사각형: 둥근 모서리 5">
+            <a:extLst>
+              <a:ext uri="{FF2B5EF4-FFF2-40B4-BE49-F238E27FC236}">
+                <a16:creationId xmlns:a16="http://schemas.microsoft.com/office/drawing/2014/main" id="{9CC189E7-1E73-0D79-41E2-9D0EC90FA5B9}"/>
+              </a:ext>
+            </a:extLst>
+          </p:cNvPr>
+          <p:cNvSpPr/>
+          <p:nvPr/>
+        </p:nvSpPr>
+        <p:spPr>
+          <a:xfrm>
+            <a:off x="724277" y="407406"/>
+            <a:ext cx="2399169" cy="1376127"/>
+          </a:xfrm>
+          <a:prstGeom prst="roundRect">
+            <a:avLst/>
+          </a:prstGeom>
+        </p:spPr>
+        <p:style>
+          <a:lnRef idx="2">
+            <a:schemeClr val="dk1"/>
+          </a:lnRef>
+          <a:fillRef idx="1">
+            <a:schemeClr val="lt1"/>
+          </a:fillRef>
+          <a:effectRef idx="0">
+            <a:schemeClr val="dk1"/>
+          </a:effectRef>
+          <a:fontRef idx="minor">
+            <a:schemeClr val="dk1"/>
+          </a:fontRef>
+        </p:style>
+        <p:txBody>
+          <a:bodyPr rtlCol="0" anchor="ctr"/>
+          <a:lstStyle/>
+          <a:p>
+            <a:pPr algn="ctr"/>
+            <a:r>
+              <a:rPr lang="ko-KR" altLang="en-US" dirty="0"/>
+              <a:t>개발</a:t>
+            </a:r>
+            <a:endParaRPr lang="en-US" altLang="ko-KR" dirty="0"/>
+          </a:p>
+          <a:p>
+            <a:pPr algn="ctr"/>
+            <a:r>
+              <a:rPr lang="en-US" altLang="ko-KR" dirty="0"/>
+              <a:t>(coding)</a:t>
+            </a:r>
+            <a:endParaRPr lang="ko-KR" altLang="en-US" dirty="0"/>
+          </a:p>
+        </p:txBody>
+      </p:sp>
+      <p:sp>
+        <p:nvSpPr>
+          <p:cNvPr id="7" name="사각형: 둥근 모서리 6">
+            <a:extLst>
+              <a:ext uri="{FF2B5EF4-FFF2-40B4-BE49-F238E27FC236}">
+                <a16:creationId xmlns:a16="http://schemas.microsoft.com/office/drawing/2014/main" id="{4D808BD2-5049-B261-5986-AA8BDFC2EB21}"/>
+              </a:ext>
+            </a:extLst>
+          </p:cNvPr>
+          <p:cNvSpPr/>
+          <p:nvPr/>
+        </p:nvSpPr>
+        <p:spPr>
+          <a:xfrm>
+            <a:off x="3820562" y="407406"/>
+            <a:ext cx="6156357" cy="1376127"/>
+          </a:xfrm>
+          <a:prstGeom prst="roundRect">
+            <a:avLst/>
+          </a:prstGeom>
+        </p:spPr>
+        <p:style>
+          <a:lnRef idx="2">
+            <a:schemeClr val="dk1"/>
+          </a:lnRef>
+          <a:fillRef idx="1">
+            <a:schemeClr val="lt1"/>
+          </a:fillRef>
+          <a:effectRef idx="0">
+            <a:schemeClr val="dk1"/>
+          </a:effectRef>
+          <a:fontRef idx="minor">
+            <a:schemeClr val="dk1"/>
+          </a:fontRef>
+        </p:style>
+        <p:txBody>
+          <a:bodyPr rtlCol="0" anchor="ctr"/>
+          <a:lstStyle/>
+          <a:p>
+            <a:pPr algn="ctr"/>
+            <a:r>
+              <a:rPr lang="ko-KR" altLang="en-US" dirty="0"/>
+              <a:t>컴파일</a:t>
+            </a:r>
+            <a:endParaRPr lang="en-US" altLang="ko-KR" dirty="0"/>
+          </a:p>
+          <a:p>
+            <a:pPr algn="ctr"/>
+            <a:r>
+              <a:rPr lang="en-US" altLang="ko-KR" dirty="0"/>
+              <a:t>(</a:t>
+            </a:r>
+            <a:r>
+              <a:rPr lang="en-US" altLang="ko-KR" dirty="0" err="1"/>
+              <a:t>dll</a:t>
+            </a:r>
+            <a:r>
+              <a:rPr lang="en-US" altLang="ko-KR" dirty="0"/>
+              <a:t> </a:t>
+            </a:r>
+            <a:r>
+              <a:rPr lang="ko-KR" altLang="en-US" dirty="0"/>
+              <a:t>파일 생성</a:t>
+            </a:r>
+            <a:r>
+              <a:rPr lang="en-US" altLang="ko-KR" dirty="0"/>
+              <a:t>)</a:t>
+            </a:r>
+          </a:p>
+          <a:p>
+            <a:pPr algn="ctr"/>
+            <a:endParaRPr lang="en-US" altLang="ko-KR" dirty="0"/>
+          </a:p>
+          <a:p>
+            <a:pPr algn="ctr"/>
+            <a:r>
+              <a:rPr lang="ko-KR" altLang="en-US" dirty="0"/>
+              <a:t>경로</a:t>
+            </a:r>
+            <a:r>
+              <a:rPr lang="en-US" altLang="ko-KR" dirty="0"/>
+              <a:t>: /</a:t>
+            </a:r>
+            <a:r>
+              <a:rPr lang="en-US" altLang="ko-KR" dirty="0" err="1"/>
+              <a:t>Appdata</a:t>
+            </a:r>
+            <a:r>
+              <a:rPr lang="en-US" altLang="ko-KR" dirty="0"/>
+              <a:t>/Roaming/Autodesk/Revit/</a:t>
+            </a:r>
+            <a:r>
+              <a:rPr lang="en-US" altLang="ko-KR" dirty="0" err="1"/>
+              <a:t>Addins</a:t>
+            </a:r>
+            <a:r>
+              <a:rPr lang="en-US" altLang="ko-KR" dirty="0"/>
+              <a:t>/{</a:t>
+            </a:r>
+            <a:r>
+              <a:rPr lang="ko-KR" altLang="en-US" dirty="0"/>
+              <a:t>버전</a:t>
+            </a:r>
+            <a:r>
+              <a:rPr lang="en-US" altLang="ko-KR" dirty="0"/>
+              <a:t>}</a:t>
+            </a:r>
+          </a:p>
+        </p:txBody>
+      </p:sp>
+      <p:sp>
+        <p:nvSpPr>
+          <p:cNvPr id="8" name="사각형: 둥근 모서리 7">
+            <a:extLst>
+              <a:ext uri="{FF2B5EF4-FFF2-40B4-BE49-F238E27FC236}">
+                <a16:creationId xmlns:a16="http://schemas.microsoft.com/office/drawing/2014/main" id="{BA181B02-29BB-47D8-C02B-CE0B9C619485}"/>
+              </a:ext>
+            </a:extLst>
+          </p:cNvPr>
+          <p:cNvSpPr/>
+          <p:nvPr/>
+        </p:nvSpPr>
+        <p:spPr>
+          <a:xfrm>
+            <a:off x="724277" y="2553077"/>
+            <a:ext cx="4164594" cy="1376127"/>
+          </a:xfrm>
+          <a:prstGeom prst="roundRect">
+            <a:avLst/>
+          </a:prstGeom>
+        </p:spPr>
+        <p:style>
+          <a:lnRef idx="2">
+            <a:schemeClr val="dk1"/>
+          </a:lnRef>
+          <a:fillRef idx="1">
+            <a:schemeClr val="lt1"/>
+          </a:fillRef>
+          <a:effectRef idx="0">
+            <a:schemeClr val="dk1"/>
+          </a:effectRef>
+          <a:fontRef idx="minor">
+            <a:schemeClr val="dk1"/>
+          </a:fontRef>
+        </p:style>
+        <p:txBody>
+          <a:bodyPr rtlCol="0" anchor="ctr"/>
+          <a:lstStyle/>
+          <a:p>
+            <a:pPr algn="ctr"/>
+            <a:r>
+              <a:rPr lang="ko-KR" altLang="en-US" dirty="0"/>
+              <a:t>설치</a:t>
+            </a:r>
+            <a:r>
+              <a:rPr lang="en-US" altLang="ko-KR" dirty="0"/>
+              <a:t> </a:t>
+            </a:r>
+            <a:r>
+              <a:rPr lang="ko-KR" altLang="en-US" dirty="0"/>
+              <a:t>파일 생성</a:t>
+            </a:r>
+            <a:endParaRPr lang="en-US" altLang="ko-KR" dirty="0"/>
+          </a:p>
+          <a:p>
+            <a:pPr algn="ctr"/>
+            <a:r>
+              <a:rPr lang="en-US" altLang="ko-KR" dirty="0"/>
+              <a:t>(</a:t>
+            </a:r>
+            <a:r>
+              <a:rPr lang="en-US" altLang="ko-KR" dirty="0" err="1"/>
+              <a:t>iss</a:t>
+            </a:r>
+            <a:r>
+              <a:rPr lang="en-US" altLang="ko-KR" dirty="0"/>
+              <a:t> script </a:t>
+            </a:r>
+            <a:r>
+              <a:rPr lang="ko-KR" altLang="en-US" dirty="0"/>
+              <a:t>문서를 통해 </a:t>
+            </a:r>
+            <a:r>
+              <a:rPr lang="en-US" altLang="ko-KR" dirty="0"/>
+              <a:t>exe </a:t>
+            </a:r>
+            <a:r>
+              <a:rPr lang="ko-KR" altLang="en-US" dirty="0"/>
+              <a:t>파일 생성</a:t>
+            </a:r>
+            <a:r>
+              <a:rPr lang="en-US" altLang="ko-KR" dirty="0"/>
+              <a:t>)</a:t>
+            </a:r>
+            <a:endParaRPr lang="ko-KR" altLang="en-US" dirty="0"/>
+          </a:p>
+        </p:txBody>
+      </p:sp>
+      <p:sp>
+        <p:nvSpPr>
+          <p:cNvPr id="9" name="사각형: 둥근 모서리 8">
+            <a:extLst>
+              <a:ext uri="{FF2B5EF4-FFF2-40B4-BE49-F238E27FC236}">
+                <a16:creationId xmlns:a16="http://schemas.microsoft.com/office/drawing/2014/main" id="{AD71868C-84AA-07CA-3D91-FA59B06E5956}"/>
+              </a:ext>
+            </a:extLst>
+          </p:cNvPr>
+          <p:cNvSpPr/>
+          <p:nvPr/>
+        </p:nvSpPr>
+        <p:spPr>
+          <a:xfrm>
+            <a:off x="6328373" y="2553077"/>
+            <a:ext cx="5441132" cy="1376127"/>
+          </a:xfrm>
+          <a:prstGeom prst="roundRect">
+            <a:avLst/>
+          </a:prstGeom>
+        </p:spPr>
+        <p:style>
+          <a:lnRef idx="2">
+            <a:schemeClr val="dk1"/>
+          </a:lnRef>
+          <a:fillRef idx="1">
+            <a:schemeClr val="lt1"/>
+          </a:fillRef>
+          <a:effectRef idx="0">
+            <a:schemeClr val="dk1"/>
+          </a:effectRef>
+          <a:fontRef idx="minor">
+            <a:schemeClr val="dk1"/>
+          </a:fontRef>
+        </p:style>
+        <p:txBody>
+          <a:bodyPr rtlCol="0" anchor="ctr"/>
+          <a:lstStyle/>
+          <a:p>
+            <a:pPr algn="ctr"/>
+            <a:r>
+              <a:rPr lang="en-US" altLang="ko-KR" dirty="0"/>
+              <a:t>exe </a:t>
+            </a:r>
+            <a:r>
+              <a:rPr lang="ko-KR" altLang="en-US" dirty="0"/>
+              <a:t>파일을 통해 </a:t>
+            </a:r>
+            <a:r>
+              <a:rPr lang="en-US" altLang="ko-KR" dirty="0"/>
+              <a:t>User </a:t>
+            </a:r>
+            <a:r>
+              <a:rPr lang="ko-KR" altLang="en-US" dirty="0"/>
+              <a:t>경로에 </a:t>
+            </a:r>
+            <a:r>
+              <a:rPr lang="en-US" altLang="ko-KR" dirty="0" err="1"/>
+              <a:t>dll</a:t>
+            </a:r>
+            <a:r>
+              <a:rPr lang="en-US" altLang="ko-KR" dirty="0"/>
+              <a:t>, </a:t>
+            </a:r>
+            <a:r>
+              <a:rPr lang="en-US" altLang="ko-KR" dirty="0" err="1"/>
+              <a:t>addin</a:t>
+            </a:r>
+            <a:r>
+              <a:rPr lang="en-US" altLang="ko-KR" dirty="0"/>
+              <a:t> </a:t>
+            </a:r>
+            <a:r>
+              <a:rPr lang="ko-KR" altLang="en-US" dirty="0"/>
+              <a:t>파일 복사</a:t>
+            </a:r>
+          </a:p>
+        </p:txBody>
+      </p:sp>
+    </p:spTree>
+    <p:extLst>
+      <p:ext uri="{BB962C8B-B14F-4D97-AF65-F5344CB8AC3E}">
+        <p14:creationId xmlns:p14="http://schemas.microsoft.com/office/powerpoint/2010/main" val="2111735773"/>
+      </p:ext>
+    </p:extLst>
+  </p:cSld>
+  <p:clrMapOvr>
+    <a:masterClrMapping/>
+  </p:clrMapOvr>
+</p:sld>
+</file>
+
 <file path=ppt/slides/slide2.xml><?xml version="1.0" encoding="utf-8"?>
 <p:sld xmlns:a="http://schemas.openxmlformats.org/drawingml/2006/main" xmlns:r="http://schemas.openxmlformats.org/officeDocument/2006/relationships" xmlns:p="http://schemas.openxmlformats.org/presentationml/2006/main">
   <p:cSld>
@@ -8424,7 +8789,7 @@
         </p:blipFill>
         <p:spPr>
           <a:xfrm>
-            <a:off x="5694623" y="3838260"/>
+            <a:off x="1376120" y="3657191"/>
             <a:ext cx="4134427" cy="2038635"/>
           </a:xfrm>
           <a:prstGeom prst="rect">
@@ -8432,10 +8797,404 @@
           </a:prstGeom>
         </p:spPr>
       </p:pic>
+      <p:sp>
+        <p:nvSpPr>
+          <p:cNvPr id="6" name="TextBox 5">
+            <a:extLst>
+              <a:ext uri="{FF2B5EF4-FFF2-40B4-BE49-F238E27FC236}">
+                <a16:creationId xmlns:a16="http://schemas.microsoft.com/office/drawing/2014/main" id="{D079841C-EF40-DC0F-763B-A5087F1299BA}"/>
+              </a:ext>
+            </a:extLst>
+          </p:cNvPr>
+          <p:cNvSpPr txBox="1"/>
+          <p:nvPr/>
+        </p:nvSpPr>
+        <p:spPr>
+          <a:xfrm>
+            <a:off x="8455937" y="4273236"/>
+            <a:ext cx="2194832" cy="369332"/>
+          </a:xfrm>
+          <a:prstGeom prst="rect">
+            <a:avLst/>
+          </a:prstGeom>
+          <a:noFill/>
+        </p:spPr>
+        <p:txBody>
+          <a:bodyPr wrap="none" rtlCol="0">
+            <a:spAutoFit/>
+          </a:bodyPr>
+          <a:lstStyle/>
+          <a:p>
+            <a:r>
+              <a:rPr lang="ko-KR" altLang="en-US"/>
+              <a:t>설치 로그파일 생성</a:t>
+            </a:r>
+          </a:p>
+        </p:txBody>
+      </p:sp>
     </p:spTree>
     <p:extLst>
       <p:ext uri="{BB962C8B-B14F-4D97-AF65-F5344CB8AC3E}">
         <p14:creationId xmlns:p14="http://schemas.microsoft.com/office/powerpoint/2010/main" val="1818499958"/>
+      </p:ext>
+    </p:extLst>
+  </p:cSld>
+  <p:clrMapOvr>
+    <a:masterClrMapping/>
+  </p:clrMapOvr>
+</p:sld>
+</file>
+
+<file path=ppt/slides/slide9.xml><?xml version="1.0" encoding="utf-8"?>
+<p:sld xmlns:a="http://schemas.openxmlformats.org/drawingml/2006/main" xmlns:r="http://schemas.openxmlformats.org/officeDocument/2006/relationships" xmlns:p="http://schemas.openxmlformats.org/presentationml/2006/main">
+  <p:cSld>
+    <p:spTree>
+      <p:nvGrpSpPr>
+        <p:cNvPr id="1" name=""/>
+        <p:cNvGrpSpPr/>
+        <p:nvPr/>
+      </p:nvGrpSpPr>
+      <p:grpSpPr>
+        <a:xfrm>
+          <a:off x="0" y="0"/>
+          <a:ext cx="0" cy="0"/>
+          <a:chOff x="0" y="0"/>
+          <a:chExt cx="0" cy="0"/>
+        </a:xfrm>
+      </p:grpSpPr>
+      <p:sp>
+        <p:nvSpPr>
+          <p:cNvPr id="2" name="TextBox 1">
+            <a:extLst>
+              <a:ext uri="{FF2B5EF4-FFF2-40B4-BE49-F238E27FC236}">
+                <a16:creationId xmlns:a16="http://schemas.microsoft.com/office/drawing/2014/main" id="{3D14591A-D5C6-5872-AE87-BCA2EFDB2CA4}"/>
+              </a:ext>
+            </a:extLst>
+          </p:cNvPr>
+          <p:cNvSpPr txBox="1"/>
+          <p:nvPr/>
+        </p:nvSpPr>
+        <p:spPr>
+          <a:xfrm>
+            <a:off x="191732" y="141620"/>
+            <a:ext cx="855234" cy="369332"/>
+          </a:xfrm>
+          <a:prstGeom prst="rect">
+            <a:avLst/>
+          </a:prstGeom>
+          <a:noFill/>
+        </p:spPr>
+        <p:txBody>
+          <a:bodyPr wrap="none" rtlCol="0">
+            <a:spAutoFit/>
+          </a:bodyPr>
+          <a:lstStyle/>
+          <a:p>
+            <a:r>
+              <a:rPr lang="en-US" altLang="ko-KR" dirty="0"/>
+              <a:t>Ver.0.4</a:t>
+            </a:r>
+          </a:p>
+        </p:txBody>
+      </p:sp>
+      <p:sp>
+        <p:nvSpPr>
+          <p:cNvPr id="4" name="TextBox 3">
+            <a:extLst>
+              <a:ext uri="{FF2B5EF4-FFF2-40B4-BE49-F238E27FC236}">
+                <a16:creationId xmlns:a16="http://schemas.microsoft.com/office/drawing/2014/main" id="{5BBBBEEA-138B-4588-B168-E4C90D86B979}"/>
+              </a:ext>
+            </a:extLst>
+          </p:cNvPr>
+          <p:cNvSpPr txBox="1"/>
+          <p:nvPr/>
+        </p:nvSpPr>
+        <p:spPr>
+          <a:xfrm>
+            <a:off x="260287" y="916384"/>
+            <a:ext cx="6097508" cy="1200329"/>
+          </a:xfrm>
+          <a:prstGeom prst="rect">
+            <a:avLst/>
+          </a:prstGeom>
+          <a:noFill/>
+        </p:spPr>
+        <p:txBody>
+          <a:bodyPr wrap="square">
+            <a:spAutoFit/>
+          </a:bodyPr>
+          <a:lstStyle/>
+          <a:p>
+            <a:r>
+              <a:rPr lang="ko-KR" altLang="en-US" sz="800" dirty="0"/>
+              <a:t>[</a:t>
+            </a:r>
+            <a:r>
+              <a:rPr lang="ko-KR" altLang="en-US" sz="800" dirty="0" err="1"/>
+              <a:t>Setup</a:t>
+            </a:r>
+            <a:r>
+              <a:rPr lang="ko-KR" altLang="en-US" sz="800" dirty="0"/>
+              <a:t>]</a:t>
+            </a:r>
+          </a:p>
+          <a:p>
+            <a:r>
+              <a:rPr lang="ko-KR" altLang="en-US" sz="800" dirty="0" err="1"/>
+              <a:t>AppName</a:t>
+            </a:r>
+            <a:r>
+              <a:rPr lang="ko-KR" altLang="en-US" sz="800" dirty="0"/>
+              <a:t>=</a:t>
+            </a:r>
+            <a:r>
+              <a:rPr lang="ko-KR" altLang="en-US" sz="800" dirty="0" err="1"/>
+              <a:t>Revit</a:t>
+            </a:r>
+            <a:r>
+              <a:rPr lang="ko-KR" altLang="en-US" sz="800" dirty="0"/>
+              <a:t> </a:t>
+            </a:r>
+            <a:r>
+              <a:rPr lang="ko-KR" altLang="en-US" sz="800" dirty="0" err="1"/>
+              <a:t>Add-in</a:t>
+            </a:r>
+            <a:r>
+              <a:rPr lang="ko-KR" altLang="en-US" sz="800" dirty="0"/>
+              <a:t> </a:t>
+            </a:r>
+            <a:r>
+              <a:rPr lang="ko-KR" altLang="en-US" sz="800" dirty="0" err="1"/>
+              <a:t>Installer</a:t>
+            </a:r>
+            <a:r>
+              <a:rPr lang="ko-KR" altLang="en-US" sz="800" dirty="0"/>
+              <a:t> </a:t>
+            </a:r>
+            <a:r>
+              <a:rPr lang="ko-KR" altLang="en-US" sz="800" dirty="0" err="1"/>
+              <a:t>Test</a:t>
+            </a:r>
+            <a:endParaRPr lang="ko-KR" altLang="en-US" sz="800" dirty="0"/>
+          </a:p>
+          <a:p>
+            <a:r>
+              <a:rPr lang="ko-KR" altLang="en-US" sz="800" dirty="0" err="1"/>
+              <a:t>AppVersion</a:t>
+            </a:r>
+            <a:r>
+              <a:rPr lang="ko-KR" altLang="en-US" sz="800" dirty="0"/>
+              <a:t>=0.4</a:t>
+            </a:r>
+          </a:p>
+          <a:p>
+            <a:r>
+              <a:rPr lang="ko-KR" altLang="en-US" sz="800" dirty="0" err="1"/>
+              <a:t>DefaultDirName</a:t>
+            </a:r>
+            <a:r>
+              <a:rPr lang="ko-KR" altLang="en-US" sz="800" dirty="0"/>
+              <a:t>={</a:t>
+            </a:r>
+            <a:r>
+              <a:rPr lang="ko-KR" altLang="en-US" sz="800" dirty="0" err="1"/>
+              <a:t>userappdata</a:t>
+            </a:r>
+            <a:r>
+              <a:rPr lang="ko-KR" altLang="en-US" sz="800" dirty="0"/>
+              <a:t>}\</a:t>
+            </a:r>
+            <a:r>
+              <a:rPr lang="ko-KR" altLang="en-US" sz="800" dirty="0" err="1"/>
+              <a:t>RevitAddinInstallerTest</a:t>
+            </a:r>
+            <a:endParaRPr lang="ko-KR" altLang="en-US" sz="800" dirty="0"/>
+          </a:p>
+          <a:p>
+            <a:r>
+              <a:rPr lang="ko-KR" altLang="en-US" sz="800" dirty="0" err="1"/>
+              <a:t>DisableDirPage</a:t>
+            </a:r>
+            <a:r>
+              <a:rPr lang="ko-KR" altLang="en-US" sz="800" dirty="0"/>
+              <a:t>=</a:t>
+            </a:r>
+            <a:r>
+              <a:rPr lang="ko-KR" altLang="en-US" sz="800" dirty="0" err="1"/>
+              <a:t>yes</a:t>
+            </a:r>
+            <a:endParaRPr lang="ko-KR" altLang="en-US" sz="800" dirty="0"/>
+          </a:p>
+          <a:p>
+            <a:r>
+              <a:rPr lang="ko-KR" altLang="en-US" sz="800" dirty="0" err="1"/>
+              <a:t>OutputDir</a:t>
+            </a:r>
+            <a:r>
+              <a:rPr lang="ko-KR" altLang="en-US" sz="800" dirty="0"/>
+              <a:t>=\\</a:t>
+            </a:r>
+            <a:r>
+              <a:rPr lang="ko-KR" altLang="en-US" sz="800" dirty="0" err="1"/>
+              <a:t>idea</a:t>
+            </a:r>
+            <a:r>
+              <a:rPr lang="ko-KR" altLang="en-US" sz="800" dirty="0"/>
+              <a:t>\</a:t>
+            </a:r>
+            <a:r>
+              <a:rPr lang="ko-KR" altLang="en-US" sz="800" dirty="0" err="1"/>
+              <a:t>home</a:t>
+            </a:r>
+            <a:r>
+              <a:rPr lang="ko-KR" altLang="en-US" sz="800" dirty="0"/>
+              <a:t>\</a:t>
+            </a:r>
+            <a:r>
+              <a:rPr lang="ko-KR" altLang="en-US" sz="800" dirty="0" err="1"/>
+              <a:t>test</a:t>
+            </a:r>
+            <a:endParaRPr lang="ko-KR" altLang="en-US" sz="800" dirty="0"/>
+          </a:p>
+          <a:p>
+            <a:r>
+              <a:rPr lang="ko-KR" altLang="en-US" sz="800" dirty="0" err="1"/>
+              <a:t>OutputBaseFilename</a:t>
+            </a:r>
+            <a:r>
+              <a:rPr lang="ko-KR" altLang="en-US" sz="800" dirty="0"/>
+              <a:t>=</a:t>
+            </a:r>
+            <a:r>
+              <a:rPr lang="ko-KR" altLang="en-US" sz="800" dirty="0" err="1"/>
+              <a:t>Revit</a:t>
+            </a:r>
+            <a:r>
+              <a:rPr lang="ko-KR" altLang="en-US" sz="800" dirty="0"/>
+              <a:t> </a:t>
+            </a:r>
+            <a:r>
+              <a:rPr lang="ko-KR" altLang="en-US" sz="800" dirty="0" err="1"/>
+              <a:t>Add-in</a:t>
+            </a:r>
+            <a:r>
+              <a:rPr lang="ko-KR" altLang="en-US" sz="800" dirty="0"/>
+              <a:t> </a:t>
+            </a:r>
+            <a:r>
+              <a:rPr lang="ko-KR" altLang="en-US" sz="800" dirty="0" err="1"/>
+              <a:t>Installer</a:t>
+            </a:r>
+            <a:r>
+              <a:rPr lang="ko-KR" altLang="en-US" sz="800" dirty="0"/>
+              <a:t> Test.v0.4</a:t>
+            </a:r>
+          </a:p>
+          <a:p>
+            <a:r>
+              <a:rPr lang="ko-KR" altLang="en-US" sz="800" dirty="0" err="1"/>
+              <a:t>Compression</a:t>
+            </a:r>
+            <a:r>
+              <a:rPr lang="ko-KR" altLang="en-US" sz="800" dirty="0"/>
+              <a:t>=</a:t>
+            </a:r>
+            <a:r>
+              <a:rPr lang="ko-KR" altLang="en-US" sz="800" dirty="0" err="1"/>
+              <a:t>lzma</a:t>
+            </a:r>
+            <a:endParaRPr lang="ko-KR" altLang="en-US" sz="800" dirty="0"/>
+          </a:p>
+          <a:p>
+            <a:r>
+              <a:rPr lang="ko-KR" altLang="en-US" sz="800" dirty="0" err="1"/>
+              <a:t>SolidCompression</a:t>
+            </a:r>
+            <a:r>
+              <a:rPr lang="ko-KR" altLang="en-US" sz="800" dirty="0"/>
+              <a:t>=</a:t>
+            </a:r>
+            <a:r>
+              <a:rPr lang="ko-KR" altLang="en-US" sz="800" dirty="0" err="1"/>
+              <a:t>yes</a:t>
+            </a:r>
+            <a:endParaRPr lang="ko-KR" altLang="en-US" sz="800" dirty="0"/>
+          </a:p>
+        </p:txBody>
+      </p:sp>
+      <p:pic>
+        <p:nvPicPr>
+          <p:cNvPr id="6" name="그림 5">
+            <a:extLst>
+              <a:ext uri="{FF2B5EF4-FFF2-40B4-BE49-F238E27FC236}">
+                <a16:creationId xmlns:a16="http://schemas.microsoft.com/office/drawing/2014/main" id="{DB42ACFA-A228-C391-9446-9FBF7AE6DA82}"/>
+              </a:ext>
+            </a:extLst>
+          </p:cNvPr>
+          <p:cNvPicPr>
+            <a:picLocks noChangeAspect="1"/>
+          </p:cNvPicPr>
+          <p:nvPr/>
+        </p:nvPicPr>
+        <p:blipFill>
+          <a:blip r:embed="rId2"/>
+          <a:stretch>
+            <a:fillRect/>
+          </a:stretch>
+        </p:blipFill>
+        <p:spPr>
+          <a:xfrm>
+            <a:off x="403510" y="2417214"/>
+            <a:ext cx="5811061" cy="1552792"/>
+          </a:xfrm>
+          <a:prstGeom prst="rect">
+            <a:avLst/>
+          </a:prstGeom>
+        </p:spPr>
+      </p:pic>
+      <p:sp>
+        <p:nvSpPr>
+          <p:cNvPr id="7" name="TextBox 6">
+            <a:extLst>
+              <a:ext uri="{FF2B5EF4-FFF2-40B4-BE49-F238E27FC236}">
+                <a16:creationId xmlns:a16="http://schemas.microsoft.com/office/drawing/2014/main" id="{77A3ED0B-C357-AA4A-354D-49FC8BCAEF75}"/>
+              </a:ext>
+            </a:extLst>
+          </p:cNvPr>
+          <p:cNvSpPr txBox="1"/>
+          <p:nvPr/>
+        </p:nvSpPr>
+        <p:spPr>
+          <a:xfrm>
+            <a:off x="7985156" y="2779414"/>
+            <a:ext cx="2194832" cy="369332"/>
+          </a:xfrm>
+          <a:prstGeom prst="rect">
+            <a:avLst/>
+          </a:prstGeom>
+          <a:noFill/>
+        </p:spPr>
+        <p:txBody>
+          <a:bodyPr wrap="none" rtlCol="0">
+            <a:spAutoFit/>
+          </a:bodyPr>
+          <a:lstStyle/>
+          <a:p>
+            <a:r>
+              <a:rPr lang="ko-KR" altLang="en-US" err="1"/>
+              <a:t>공유폴더</a:t>
+            </a:r>
+            <a:r>
+              <a:rPr lang="ko-KR" altLang="en-US" dirty="0"/>
+              <a:t> 활용 가능</a:t>
+            </a:r>
+          </a:p>
+        </p:txBody>
+      </p:sp>
+    </p:spTree>
+    <p:extLst>
+      <p:ext uri="{BB962C8B-B14F-4D97-AF65-F5344CB8AC3E}">
+        <p14:creationId xmlns:p14="http://schemas.microsoft.com/office/powerpoint/2010/main" val="2068805992"/>
       </p:ext>
     </p:extLst>
   </p:cSld>

--- a/setup installer.pptx
+++ b/setup installer.pptx
@@ -15,6 +15,10 @@
     <p:sldId id="261" r:id="rId9"/>
     <p:sldId id="264" r:id="rId10"/>
     <p:sldId id="265" r:id="rId11"/>
+    <p:sldId id="266" r:id="rId12"/>
+    <p:sldId id="267" r:id="rId13"/>
+    <p:sldId id="268" r:id="rId14"/>
+    <p:sldId id="269" r:id="rId15"/>
   </p:sldIdLst>
   <p:sldSz cx="12192000" cy="6858000"/>
   <p:notesSz cx="6858000" cy="9144000"/>
@@ -113,6 +117,11 @@
       </a:defRPr>
     </a:lvl9pPr>
   </p:defaultTextStyle>
+  <p:extLst>
+    <p:ext uri="{EFAFB233-063F-42B5-8137-9DF3F51BA10A}">
+      <p15:sldGuideLst xmlns:p15="http://schemas.microsoft.com/office/powerpoint/2012/main"/>
+    </p:ext>
+  </p:extLst>
 </p:presentation>
 </file>
 
@@ -263,7 +272,7 @@
           <a:p>
             <a:fld id="{3EF23FE2-B3B7-4CA7-AE93-FEDF77A1D3BC}" type="datetimeFigureOut">
               <a:rPr lang="ko-KR" altLang="en-US" smtClean="0"/>
-              <a:t>2025-04-18</a:t>
+              <a:t>2025-04-21</a:t>
             </a:fld>
             <a:endParaRPr lang="ko-KR" altLang="en-US"/>
           </a:p>
@@ -461,7 +470,7 @@
           <a:p>
             <a:fld id="{3EF23FE2-B3B7-4CA7-AE93-FEDF77A1D3BC}" type="datetimeFigureOut">
               <a:rPr lang="ko-KR" altLang="en-US" smtClean="0"/>
-              <a:t>2025-04-18</a:t>
+              <a:t>2025-04-21</a:t>
             </a:fld>
             <a:endParaRPr lang="ko-KR" altLang="en-US"/>
           </a:p>
@@ -669,7 +678,7 @@
           <a:p>
             <a:fld id="{3EF23FE2-B3B7-4CA7-AE93-FEDF77A1D3BC}" type="datetimeFigureOut">
               <a:rPr lang="ko-KR" altLang="en-US" smtClean="0"/>
-              <a:t>2025-04-18</a:t>
+              <a:t>2025-04-21</a:t>
             </a:fld>
             <a:endParaRPr lang="ko-KR" altLang="en-US"/>
           </a:p>
@@ -867,7 +876,7 @@
           <a:p>
             <a:fld id="{3EF23FE2-B3B7-4CA7-AE93-FEDF77A1D3BC}" type="datetimeFigureOut">
               <a:rPr lang="ko-KR" altLang="en-US" smtClean="0"/>
-              <a:t>2025-04-18</a:t>
+              <a:t>2025-04-21</a:t>
             </a:fld>
             <a:endParaRPr lang="ko-KR" altLang="en-US"/>
           </a:p>
@@ -1142,7 +1151,7 @@
           <a:p>
             <a:fld id="{3EF23FE2-B3B7-4CA7-AE93-FEDF77A1D3BC}" type="datetimeFigureOut">
               <a:rPr lang="ko-KR" altLang="en-US" smtClean="0"/>
-              <a:t>2025-04-18</a:t>
+              <a:t>2025-04-21</a:t>
             </a:fld>
             <a:endParaRPr lang="ko-KR" altLang="en-US"/>
           </a:p>
@@ -1407,7 +1416,7 @@
           <a:p>
             <a:fld id="{3EF23FE2-B3B7-4CA7-AE93-FEDF77A1D3BC}" type="datetimeFigureOut">
               <a:rPr lang="ko-KR" altLang="en-US" smtClean="0"/>
-              <a:t>2025-04-18</a:t>
+              <a:t>2025-04-21</a:t>
             </a:fld>
             <a:endParaRPr lang="ko-KR" altLang="en-US"/>
           </a:p>
@@ -1819,7 +1828,7 @@
           <a:p>
             <a:fld id="{3EF23FE2-B3B7-4CA7-AE93-FEDF77A1D3BC}" type="datetimeFigureOut">
               <a:rPr lang="ko-KR" altLang="en-US" smtClean="0"/>
-              <a:t>2025-04-18</a:t>
+              <a:t>2025-04-21</a:t>
             </a:fld>
             <a:endParaRPr lang="ko-KR" altLang="en-US"/>
           </a:p>
@@ -1960,7 +1969,7 @@
           <a:p>
             <a:fld id="{3EF23FE2-B3B7-4CA7-AE93-FEDF77A1D3BC}" type="datetimeFigureOut">
               <a:rPr lang="ko-KR" altLang="en-US" smtClean="0"/>
-              <a:t>2025-04-18</a:t>
+              <a:t>2025-04-21</a:t>
             </a:fld>
             <a:endParaRPr lang="ko-KR" altLang="en-US"/>
           </a:p>
@@ -2073,7 +2082,7 @@
           <a:p>
             <a:fld id="{3EF23FE2-B3B7-4CA7-AE93-FEDF77A1D3BC}" type="datetimeFigureOut">
               <a:rPr lang="ko-KR" altLang="en-US" smtClean="0"/>
-              <a:t>2025-04-18</a:t>
+              <a:t>2025-04-21</a:t>
             </a:fld>
             <a:endParaRPr lang="ko-KR" altLang="en-US"/>
           </a:p>
@@ -2384,7 +2393,7 @@
           <a:p>
             <a:fld id="{3EF23FE2-B3B7-4CA7-AE93-FEDF77A1D3BC}" type="datetimeFigureOut">
               <a:rPr lang="ko-KR" altLang="en-US" smtClean="0"/>
-              <a:t>2025-04-18</a:t>
+              <a:t>2025-04-21</a:t>
             </a:fld>
             <a:endParaRPr lang="ko-KR" altLang="en-US"/>
           </a:p>
@@ -2672,7 +2681,7 @@
           <a:p>
             <a:fld id="{3EF23FE2-B3B7-4CA7-AE93-FEDF77A1D3BC}" type="datetimeFigureOut">
               <a:rPr lang="ko-KR" altLang="en-US" smtClean="0"/>
-              <a:t>2025-04-18</a:t>
+              <a:t>2025-04-21</a:t>
             </a:fld>
             <a:endParaRPr lang="ko-KR" altLang="en-US"/>
           </a:p>
@@ -2913,7 +2922,7 @@
           <a:p>
             <a:fld id="{3EF23FE2-B3B7-4CA7-AE93-FEDF77A1D3BC}" type="datetimeFigureOut">
               <a:rPr lang="ko-KR" altLang="en-US" smtClean="0"/>
-              <a:t>2025-04-18</a:t>
+              <a:t>2025-04-21</a:t>
             </a:fld>
             <a:endParaRPr lang="ko-KR" altLang="en-US"/>
           </a:p>
@@ -3766,6 +3775,216 @@
 </p:sld>
 </file>
 
+<file path=ppt/slides/slide11.xml><?xml version="1.0" encoding="utf-8"?>
+<p:sld xmlns:a="http://schemas.openxmlformats.org/drawingml/2006/main" xmlns:r="http://schemas.openxmlformats.org/officeDocument/2006/relationships" xmlns:p="http://schemas.openxmlformats.org/presentationml/2006/main">
+  <p:cSld>
+    <p:spTree>
+      <p:nvGrpSpPr>
+        <p:cNvPr id="1" name=""/>
+        <p:cNvGrpSpPr/>
+        <p:nvPr/>
+      </p:nvGrpSpPr>
+      <p:grpSpPr>
+        <a:xfrm>
+          <a:off x="0" y="0"/>
+          <a:ext cx="0" cy="0"/>
+          <a:chOff x="0" y="0"/>
+          <a:chExt cx="0" cy="0"/>
+        </a:xfrm>
+      </p:grpSpPr>
+    </p:spTree>
+    <p:extLst>
+      <p:ext uri="{BB962C8B-B14F-4D97-AF65-F5344CB8AC3E}">
+        <p14:creationId xmlns:p14="http://schemas.microsoft.com/office/powerpoint/2010/main" val="2979980939"/>
+      </p:ext>
+    </p:extLst>
+  </p:cSld>
+  <p:clrMapOvr>
+    <a:masterClrMapping/>
+  </p:clrMapOvr>
+</p:sld>
+</file>
+
+<file path=ppt/slides/slide12.xml><?xml version="1.0" encoding="utf-8"?>
+<p:sld xmlns:a="http://schemas.openxmlformats.org/drawingml/2006/main" xmlns:r="http://schemas.openxmlformats.org/officeDocument/2006/relationships" xmlns:p="http://schemas.openxmlformats.org/presentationml/2006/main">
+  <p:cSld>
+    <p:spTree>
+      <p:nvGrpSpPr>
+        <p:cNvPr id="1" name=""/>
+        <p:cNvGrpSpPr/>
+        <p:nvPr/>
+      </p:nvGrpSpPr>
+      <p:grpSpPr>
+        <a:xfrm>
+          <a:off x="0" y="0"/>
+          <a:ext cx="0" cy="0"/>
+          <a:chOff x="0" y="0"/>
+          <a:chExt cx="0" cy="0"/>
+        </a:xfrm>
+      </p:grpSpPr>
+      <p:pic>
+        <p:nvPicPr>
+          <p:cNvPr id="3" name="그림 2">
+            <a:extLst>
+              <a:ext uri="{FF2B5EF4-FFF2-40B4-BE49-F238E27FC236}">
+                <a16:creationId xmlns:a16="http://schemas.microsoft.com/office/drawing/2014/main" id="{8933C8C5-8ACA-3008-57EF-A33646E6C3AC}"/>
+              </a:ext>
+            </a:extLst>
+          </p:cNvPr>
+          <p:cNvPicPr>
+            <a:picLocks noChangeAspect="1"/>
+          </p:cNvPicPr>
+          <p:nvPr/>
+        </p:nvPicPr>
+        <p:blipFill>
+          <a:blip r:embed="rId2"/>
+          <a:stretch>
+            <a:fillRect/>
+          </a:stretch>
+        </p:blipFill>
+        <p:spPr>
+          <a:xfrm>
+            <a:off x="3395" y="0"/>
+            <a:ext cx="4696480" cy="3686689"/>
+          </a:xfrm>
+          <a:prstGeom prst="rect">
+            <a:avLst/>
+          </a:prstGeom>
+        </p:spPr>
+      </p:pic>
+      <p:pic>
+        <p:nvPicPr>
+          <p:cNvPr id="5" name="그림 4">
+            <a:extLst>
+              <a:ext uri="{FF2B5EF4-FFF2-40B4-BE49-F238E27FC236}">
+                <a16:creationId xmlns:a16="http://schemas.microsoft.com/office/drawing/2014/main" id="{7C28F068-B6A6-5E8B-40F1-7986F2436322}"/>
+              </a:ext>
+            </a:extLst>
+          </p:cNvPr>
+          <p:cNvPicPr>
+            <a:picLocks noChangeAspect="1"/>
+          </p:cNvPicPr>
+          <p:nvPr/>
+        </p:nvPicPr>
+        <p:blipFill>
+          <a:blip r:embed="rId3"/>
+          <a:stretch>
+            <a:fillRect/>
+          </a:stretch>
+        </p:blipFill>
+        <p:spPr>
+          <a:xfrm>
+            <a:off x="4699875" y="0"/>
+            <a:ext cx="4772691" cy="3648584"/>
+          </a:xfrm>
+          <a:prstGeom prst="rect">
+            <a:avLst/>
+          </a:prstGeom>
+        </p:spPr>
+      </p:pic>
+      <p:pic>
+        <p:nvPicPr>
+          <p:cNvPr id="7" name="그림 6">
+            <a:extLst>
+              <a:ext uri="{FF2B5EF4-FFF2-40B4-BE49-F238E27FC236}">
+                <a16:creationId xmlns:a16="http://schemas.microsoft.com/office/drawing/2014/main" id="{65BDD3CE-1A04-94A5-4DDF-262F6B302AC6}"/>
+              </a:ext>
+            </a:extLst>
+          </p:cNvPr>
+          <p:cNvPicPr>
+            <a:picLocks noChangeAspect="1"/>
+          </p:cNvPicPr>
+          <p:nvPr/>
+        </p:nvPicPr>
+        <p:blipFill>
+          <a:blip r:embed="rId4"/>
+          <a:stretch>
+            <a:fillRect/>
+          </a:stretch>
+        </p:blipFill>
+        <p:spPr>
+          <a:xfrm>
+            <a:off x="7492125" y="3190363"/>
+            <a:ext cx="4696480" cy="3667637"/>
+          </a:xfrm>
+          <a:prstGeom prst="rect">
+            <a:avLst/>
+          </a:prstGeom>
+        </p:spPr>
+      </p:pic>
+    </p:spTree>
+    <p:extLst>
+      <p:ext uri="{BB962C8B-B14F-4D97-AF65-F5344CB8AC3E}">
+        <p14:creationId xmlns:p14="http://schemas.microsoft.com/office/powerpoint/2010/main" val="1172840570"/>
+      </p:ext>
+    </p:extLst>
+  </p:cSld>
+  <p:clrMapOvr>
+    <a:masterClrMapping/>
+  </p:clrMapOvr>
+</p:sld>
+</file>
+
+<file path=ppt/slides/slide13.xml><?xml version="1.0" encoding="utf-8"?>
+<p:sld xmlns:a="http://schemas.openxmlformats.org/drawingml/2006/main" xmlns:r="http://schemas.openxmlformats.org/officeDocument/2006/relationships" xmlns:p="http://schemas.openxmlformats.org/presentationml/2006/main">
+  <p:cSld>
+    <p:spTree>
+      <p:nvGrpSpPr>
+        <p:cNvPr id="1" name=""/>
+        <p:cNvGrpSpPr/>
+        <p:nvPr/>
+      </p:nvGrpSpPr>
+      <p:grpSpPr>
+        <a:xfrm>
+          <a:off x="0" y="0"/>
+          <a:ext cx="0" cy="0"/>
+          <a:chOff x="0" y="0"/>
+          <a:chExt cx="0" cy="0"/>
+        </a:xfrm>
+      </p:grpSpPr>
+    </p:spTree>
+    <p:extLst>
+      <p:ext uri="{BB962C8B-B14F-4D97-AF65-F5344CB8AC3E}">
+        <p14:creationId xmlns:p14="http://schemas.microsoft.com/office/powerpoint/2010/main" val="1602022328"/>
+      </p:ext>
+    </p:extLst>
+  </p:cSld>
+  <p:clrMapOvr>
+    <a:masterClrMapping/>
+  </p:clrMapOvr>
+</p:sld>
+</file>
+
+<file path=ppt/slides/slide14.xml><?xml version="1.0" encoding="utf-8"?>
+<p:sld xmlns:a="http://schemas.openxmlformats.org/drawingml/2006/main" xmlns:r="http://schemas.openxmlformats.org/officeDocument/2006/relationships" xmlns:p="http://schemas.openxmlformats.org/presentationml/2006/main">
+  <p:cSld>
+    <p:spTree>
+      <p:nvGrpSpPr>
+        <p:cNvPr id="1" name=""/>
+        <p:cNvGrpSpPr/>
+        <p:nvPr/>
+      </p:nvGrpSpPr>
+      <p:grpSpPr>
+        <a:xfrm>
+          <a:off x="0" y="0"/>
+          <a:ext cx="0" cy="0"/>
+          <a:chOff x="0" y="0"/>
+          <a:chExt cx="0" cy="0"/>
+        </a:xfrm>
+      </p:grpSpPr>
+    </p:spTree>
+    <p:extLst>
+      <p:ext uri="{BB962C8B-B14F-4D97-AF65-F5344CB8AC3E}">
+        <p14:creationId xmlns:p14="http://schemas.microsoft.com/office/powerpoint/2010/main" val="4061745166"/>
+      </p:ext>
+    </p:extLst>
+  </p:cSld>
+  <p:clrMapOvr>
+    <a:masterClrMapping/>
+  </p:clrMapOvr>
+</p:sld>
+</file>
+
 <file path=ppt/slides/slide2.xml><?xml version="1.0" encoding="utf-8"?>
 <p:sld xmlns:a="http://schemas.openxmlformats.org/drawingml/2006/main" xmlns:r="http://schemas.openxmlformats.org/officeDocument/2006/relationships" xmlns:p="http://schemas.openxmlformats.org/presentationml/2006/main">
   <p:cSld>

--- a/setup installer.pptx
+++ b/setup installer.pptx
@@ -3942,6 +3942,126 @@
           <a:chExt cx="0" cy="0"/>
         </a:xfrm>
       </p:grpSpPr>
+      <p:pic>
+        <p:nvPicPr>
+          <p:cNvPr id="3" name="그림 2">
+            <a:extLst>
+              <a:ext uri="{FF2B5EF4-FFF2-40B4-BE49-F238E27FC236}">
+                <a16:creationId xmlns:a16="http://schemas.microsoft.com/office/drawing/2014/main" id="{27A6FDFA-5DCF-8293-E432-3C58089024FA}"/>
+              </a:ext>
+            </a:extLst>
+          </p:cNvPr>
+          <p:cNvPicPr>
+            <a:picLocks noChangeAspect="1"/>
+          </p:cNvPicPr>
+          <p:nvPr/>
+        </p:nvPicPr>
+        <p:blipFill>
+          <a:blip r:embed="rId2"/>
+          <a:stretch>
+            <a:fillRect/>
+          </a:stretch>
+        </p:blipFill>
+        <p:spPr>
+          <a:xfrm>
+            <a:off x="4959978" y="0"/>
+            <a:ext cx="4734586" cy="3677163"/>
+          </a:xfrm>
+          <a:prstGeom prst="rect">
+            <a:avLst/>
+          </a:prstGeom>
+        </p:spPr>
+      </p:pic>
+      <p:pic>
+        <p:nvPicPr>
+          <p:cNvPr id="5" name="그림 4">
+            <a:extLst>
+              <a:ext uri="{FF2B5EF4-FFF2-40B4-BE49-F238E27FC236}">
+                <a16:creationId xmlns:a16="http://schemas.microsoft.com/office/drawing/2014/main" id="{E0D6BC73-B20C-13DB-A641-C91A7CEAA026}"/>
+              </a:ext>
+            </a:extLst>
+          </p:cNvPr>
+          <p:cNvPicPr>
+            <a:picLocks noChangeAspect="1"/>
+          </p:cNvPicPr>
+          <p:nvPr/>
+        </p:nvPicPr>
+        <p:blipFill>
+          <a:blip r:embed="rId3"/>
+          <a:stretch>
+            <a:fillRect/>
+          </a:stretch>
+        </p:blipFill>
+        <p:spPr>
+          <a:xfrm>
+            <a:off x="0" y="0"/>
+            <a:ext cx="4696480" cy="3667637"/>
+          </a:xfrm>
+          <a:prstGeom prst="rect">
+            <a:avLst/>
+          </a:prstGeom>
+        </p:spPr>
+      </p:pic>
+      <p:pic>
+        <p:nvPicPr>
+          <p:cNvPr id="7" name="그림 6">
+            <a:extLst>
+              <a:ext uri="{FF2B5EF4-FFF2-40B4-BE49-F238E27FC236}">
+                <a16:creationId xmlns:a16="http://schemas.microsoft.com/office/drawing/2014/main" id="{6F78DCCC-8A01-63CF-C708-2C5C4579476E}"/>
+              </a:ext>
+            </a:extLst>
+          </p:cNvPr>
+          <p:cNvPicPr>
+            <a:picLocks noChangeAspect="1"/>
+          </p:cNvPicPr>
+          <p:nvPr/>
+        </p:nvPicPr>
+        <p:blipFill>
+          <a:blip r:embed="rId4"/>
+          <a:stretch>
+            <a:fillRect/>
+          </a:stretch>
+        </p:blipFill>
+        <p:spPr>
+          <a:xfrm>
+            <a:off x="19052" y="3180837"/>
+            <a:ext cx="4677428" cy="3677163"/>
+          </a:xfrm>
+          <a:prstGeom prst="rect">
+            <a:avLst/>
+          </a:prstGeom>
+        </p:spPr>
+      </p:pic>
+      <p:pic>
+        <p:nvPicPr>
+          <p:cNvPr id="9" name="그림 8">
+            <a:extLst>
+              <a:ext uri="{FF2B5EF4-FFF2-40B4-BE49-F238E27FC236}">
+                <a16:creationId xmlns:a16="http://schemas.microsoft.com/office/drawing/2014/main" id="{1CB9EB2F-0379-0E12-BCB6-38D027101749}"/>
+              </a:ext>
+            </a:extLst>
+          </p:cNvPr>
+          <p:cNvPicPr>
+            <a:picLocks noChangeAspect="1"/>
+          </p:cNvPicPr>
+          <p:nvPr/>
+        </p:nvPicPr>
+        <p:blipFill>
+          <a:blip r:embed="rId5"/>
+          <a:stretch>
+            <a:fillRect/>
+          </a:stretch>
+        </p:blipFill>
+        <p:spPr>
+          <a:xfrm>
+            <a:off x="4959978" y="3142732"/>
+            <a:ext cx="4734586" cy="3715268"/>
+          </a:xfrm>
+          <a:prstGeom prst="rect">
+            <a:avLst/>
+          </a:prstGeom>
+        </p:spPr>
+      </p:pic>
     </p:spTree>
     <p:extLst>
       <p:ext uri="{BB962C8B-B14F-4D97-AF65-F5344CB8AC3E}">
